--- a/SQLTUNING/SQL튜닝_Ch02_교안.pptx
+++ b/SQLTUNING/SQL튜닝_Ch02_교안.pptx
@@ -9806,7 +9806,7 @@
                 </a:solidFill>
                 <a:latin typeface="Malgun Gothic"/>
               </a:rPr>
-              <a:t>SQL_ID  92p460f4hj858  —  대형병원·쏠림 구간</a:t>
+              <a:t>SQL_ID  0fqfut0m2jfxw  —  대형병원·쏠림 구간</a:t>
             </a:r>
           </a:p>
         </p:txBody>
@@ -9895,7 +9895,7 @@
                 </a:solidFill>
                 <a:latin typeface="Consolas"/>
               </a:rPr>
-              <a:t>| 2  |  TABLE ACCESS FULL | MEDICAL_CLAIMS |   3039 |   3058 |00:00:01.92 |    3090 |</a:t>
+              <a:t>| 2  |  TABLE ACCESS FULL | MEDICAL_CLAIMS |   2795 |   3058 |00:00:00.01 |    3090 |</a:t>
             </a:r>
           </a:p>
           <a:p>
@@ -10110,7 +10110,7 @@
                 </a:solidFill>
                 <a:latin typeface="Malgun Gothic"/>
               </a:rPr>
-              <a:t>•  추정과 실제 — E-Rows 3,039 / A-Rows 3,058</a:t>
+              <a:t>•  추정과 실제 — E-Rows 2,795 / A-Rows 3,058</a:t>
             </a:r>
           </a:p>
           <a:p>
@@ -10143,7 +10143,7 @@
                 </a:solidFill>
                 <a:latin typeface="Malgun Gothic"/>
               </a:rPr>
-              <a:t>•  실측치 — A-Time 00:00:01.92, Buffers 3,090</a:t>
+              <a:t>•  실측치 — A-Time 00:00:00.01, Buffers 3,090</a:t>
             </a:r>
           </a:p>
           <a:p>
@@ -10165,7 +10165,7 @@
                 </a:solidFill>
                 <a:latin typeface="Malgun Gothic"/>
               </a:rPr>
-              <a:t>•  이 SQL의 SQL_ID는 92p460f4hj858 — 다음 슬라이드의 값과 비교한다</a:t>
+              <a:t>•  이 SQL의 SQL_ID는 0fqfut0m2jfxw — 다음 슬라이드의 값과 비교한다</a:t>
             </a:r>
           </a:p>
           <a:p>
@@ -10314,7 +10314,7 @@
                 </a:solidFill>
                 <a:latin typeface="Malgun Gothic"/>
               </a:rPr>
-              <a:t>SQL_ID  5awbw1wcprrj2  —  일반 병원</a:t>
+              <a:t>SQL_ID  71xyxd4t42wvj  —  일반 병원</a:t>
             </a:r>
           </a:p>
         </p:txBody>
@@ -10403,7 +10403,7 @@
                 </a:solidFill>
                 <a:latin typeface="Consolas"/>
               </a:rPr>
-              <a:t>| 2  |  TABLE ACCESS FULL | MEDICAL_CLAIMS |    109 |    177 |00:00:00.01 |    3090 |</a:t>
+              <a:t>| 2  |  TABLE ACCESS FULL | MEDICAL_CLAIMS |    280 |    177 |00:00:00.01 |    3090 |</a:t>
             </a:r>
           </a:p>
           <a:p>
@@ -10596,7 +10596,7 @@
                 </a:solidFill>
                 <a:latin typeface="Malgun Gothic"/>
               </a:rPr>
-              <a:t>    –  HOSP_ID=1은 3,039, HOSP_ID=500은 109로 추정되었다</a:t>
+              <a:t>    –  HOSP_ID=1은 2,795, HOSP_ID=500은 280으로 추정되었다(표본 히스토그램이라 수집마다 ±10% 흔들린다)</a:t>
             </a:r>
           </a:p>
           <a:p>
@@ -11987,7 +11987,7 @@
                 </a:solidFill>
                 <a:latin typeface="Consolas"/>
               </a:rPr>
-              <a:t>5awbw1wcprrj2   1           1            ...WHERE hosp_id = 500</a:t>
+              <a:t>71xyxd4t42wvj   1           1            ...WHERE hosp_id = 500</a:t>
             </a:r>
           </a:p>
           <a:p>
@@ -11998,7 +11998,7 @@
                 </a:solidFill>
                 <a:latin typeface="Consolas"/>
               </a:rPr>
-              <a:t>92p460f4hj858   1           1            ...WHERE hosp_id = 1</a:t>
+              <a:t>0fqfut0m2jfxw   2           2            ...WHERE hosp_id = 1</a:t>
             </a:r>
           </a:p>
           <a:p>
@@ -12191,7 +12191,7 @@
                 </a:solidFill>
                 <a:latin typeface="Malgun Gothic"/>
               </a:rPr>
-              <a:t>    –  5awbw1wcprrj2와 92p460f4hj858 — 각각 별도로 파싱·최적화되었다</a:t>
+              <a:t>    –  71xyxd4t42wvj와 0fqfut0m2jfxw — 각각 별도로 파싱·최적화되었다</a:t>
             </a:r>
           </a:p>
           <a:p>
@@ -12495,7 +12495,7 @@
                 </a:solidFill>
                 <a:latin typeface="Consolas"/>
               </a:rPr>
-              <a:t>3zakhp3a1b0ac   2           2            ...WHERE hosp_id = :b_hosp</a:t>
+              <a:t>78qznuqcawm4c   2           2            ...WHERE hosp_id = :b_hosp</a:t>
             </a:r>
           </a:p>
           <a:p>
@@ -12677,7 +12677,7 @@
                 </a:solidFill>
                 <a:latin typeface="Malgun Gothic"/>
               </a:rPr>
-              <a:t>•  SQL_ID가 3zakhp3a1b0ac 하나로 유지되었다</a:t>
+              <a:t>•  SQL_ID가 78qznuqcawm4c 하나로 유지되었다</a:t>
             </a:r>
           </a:p>
           <a:p>
